--- a/2026.10.24 STL Day of Data/2026.10.24 Day of Data STL PPT.pptx
+++ b/2026.10.24 STL Day of Data/2026.10.24 Day of Data STL PPT.pptx
@@ -12495,7 +12495,7 @@
           <a:p>
             <a:fld id="{A404F555-6570-4A15-ABC4-1745CA5C4DCB}" type="datetimeFigureOut">
               <a:rPr lang="en-US" smtClean="0"/>
-              <a:t>10/17/2026</a:t>
+              <a:t>10/22/2026</a:t>
             </a:fld>
             <a:endParaRPr lang="en-US"/>
           </a:p>
@@ -15633,7 +15633,7 @@
           <a:p>
             <a:fld id="{EE7FC4FF-A5B5-49B5-AF2E-5BC38B72E229}" type="datetimeFigureOut">
               <a:rPr lang="en-US" smtClean="0"/>
-              <a:t>10/17/2026</a:t>
+              <a:t>10/22/2026</a:t>
             </a:fld>
             <a:endParaRPr lang="en-US"/>
           </a:p>
@@ -15831,7 +15831,7 @@
           <a:p>
             <a:fld id="{EE7FC4FF-A5B5-49B5-AF2E-5BC38B72E229}" type="datetimeFigureOut">
               <a:rPr lang="en-US" smtClean="0"/>
-              <a:t>10/17/2026</a:t>
+              <a:t>10/22/2026</a:t>
             </a:fld>
             <a:endParaRPr lang="en-US"/>
           </a:p>
@@ -16039,7 +16039,7 @@
           <a:p>
             <a:fld id="{EE7FC4FF-A5B5-49B5-AF2E-5BC38B72E229}" type="datetimeFigureOut">
               <a:rPr lang="en-US" smtClean="0"/>
-              <a:t>10/17/2026</a:t>
+              <a:t>10/22/2026</a:t>
             </a:fld>
             <a:endParaRPr lang="en-US"/>
           </a:p>
@@ -16237,7 +16237,7 @@
           <a:p>
             <a:fld id="{EE7FC4FF-A5B5-49B5-AF2E-5BC38B72E229}" type="datetimeFigureOut">
               <a:rPr lang="en-US" smtClean="0"/>
-              <a:t>10/17/2026</a:t>
+              <a:t>10/22/2026</a:t>
             </a:fld>
             <a:endParaRPr lang="en-US"/>
           </a:p>
@@ -16512,7 +16512,7 @@
           <a:p>
             <a:fld id="{EE7FC4FF-A5B5-49B5-AF2E-5BC38B72E229}" type="datetimeFigureOut">
               <a:rPr lang="en-US" smtClean="0"/>
-              <a:t>10/17/2026</a:t>
+              <a:t>10/22/2026</a:t>
             </a:fld>
             <a:endParaRPr lang="en-US"/>
           </a:p>
@@ -16777,7 +16777,7 @@
           <a:p>
             <a:fld id="{EE7FC4FF-A5B5-49B5-AF2E-5BC38B72E229}" type="datetimeFigureOut">
               <a:rPr lang="en-US" smtClean="0"/>
-              <a:t>10/17/2026</a:t>
+              <a:t>10/22/2026</a:t>
             </a:fld>
             <a:endParaRPr lang="en-US"/>
           </a:p>
@@ -17189,7 +17189,7 @@
           <a:p>
             <a:fld id="{EE7FC4FF-A5B5-49B5-AF2E-5BC38B72E229}" type="datetimeFigureOut">
               <a:rPr lang="en-US" smtClean="0"/>
-              <a:t>10/17/2026</a:t>
+              <a:t>10/22/2026</a:t>
             </a:fld>
             <a:endParaRPr lang="en-US"/>
           </a:p>
@@ -17330,7 +17330,7 @@
           <a:p>
             <a:fld id="{EE7FC4FF-A5B5-49B5-AF2E-5BC38B72E229}" type="datetimeFigureOut">
               <a:rPr lang="en-US" smtClean="0"/>
-              <a:t>10/17/2026</a:t>
+              <a:t>10/22/2026</a:t>
             </a:fld>
             <a:endParaRPr lang="en-US"/>
           </a:p>
@@ -17443,7 +17443,7 @@
           <a:p>
             <a:fld id="{EE7FC4FF-A5B5-49B5-AF2E-5BC38B72E229}" type="datetimeFigureOut">
               <a:rPr lang="en-US" smtClean="0"/>
-              <a:t>10/17/2026</a:t>
+              <a:t>10/22/2026</a:t>
             </a:fld>
             <a:endParaRPr lang="en-US"/>
           </a:p>
@@ -17754,7 +17754,7 @@
           <a:p>
             <a:fld id="{EE7FC4FF-A5B5-49B5-AF2E-5BC38B72E229}" type="datetimeFigureOut">
               <a:rPr lang="en-US" smtClean="0"/>
-              <a:t>10/17/2026</a:t>
+              <a:t>10/22/2026</a:t>
             </a:fld>
             <a:endParaRPr lang="en-US"/>
           </a:p>
@@ -18042,7 +18042,7 @@
           <a:p>
             <a:fld id="{EE7FC4FF-A5B5-49B5-AF2E-5BC38B72E229}" type="datetimeFigureOut">
               <a:rPr lang="en-US" smtClean="0"/>
-              <a:t>10/17/2026</a:t>
+              <a:t>10/22/2026</a:t>
             </a:fld>
             <a:endParaRPr lang="en-US"/>
           </a:p>
@@ -18283,7 +18283,7 @@
           <a:p>
             <a:fld id="{EE7FC4FF-A5B5-49B5-AF2E-5BC38B72E229}" type="datetimeFigureOut">
               <a:rPr lang="en-US" smtClean="0"/>
-              <a:t>10/17/2026</a:t>
+              <a:t>10/22/2026</a:t>
             </a:fld>
             <a:endParaRPr lang="en-US"/>
           </a:p>
@@ -38396,7 +38396,7 @@
                   <a:srgbClr val="FFFFFF"/>
                 </a:solidFill>
               </a:rPr>
-              <a:t>Feedback and Links</a:t>
+              <a:t>Presentation Link</a:t>
             </a:r>
           </a:p>
         </p:txBody>
